--- a/PPT Faculty-AICW Project Report- STUDENT FEEDBACK.pptx
+++ b/PPT Faculty-AICW Project Report- STUDENT FEEDBACK.pptx
@@ -5,35 +5,34 @@
     <p:sldMasterId id="2147483648" r:id="rId1"/>
   </p:sldMasterIdLst>
   <p:notesMasterIdLst>
-    <p:notesMasterId r:id="rId23"/>
+    <p:notesMasterId r:id="rId22"/>
   </p:notesMasterIdLst>
   <p:sldIdLst>
-    <p:sldId id="268" r:id="rId2"/>
-    <p:sldId id="273" r:id="rId3"/>
-    <p:sldId id="257" r:id="rId4"/>
-    <p:sldId id="258" r:id="rId5"/>
-    <p:sldId id="259" r:id="rId6"/>
-    <p:sldId id="260" r:id="rId7"/>
-    <p:sldId id="261" r:id="rId8"/>
-    <p:sldId id="279" r:id="rId9"/>
-    <p:sldId id="269" r:id="rId10"/>
-    <p:sldId id="270" r:id="rId11"/>
-    <p:sldId id="274" r:id="rId12"/>
-    <p:sldId id="275" r:id="rId13"/>
-    <p:sldId id="276" r:id="rId14"/>
-    <p:sldId id="277" r:id="rId15"/>
-    <p:sldId id="271" r:id="rId16"/>
-    <p:sldId id="278" r:id="rId17"/>
-    <p:sldId id="272" r:id="rId18"/>
-    <p:sldId id="263" r:id="rId19"/>
-    <p:sldId id="264" r:id="rId20"/>
-    <p:sldId id="265" r:id="rId21"/>
-    <p:sldId id="266" r:id="rId22"/>
+    <p:sldId id="280" r:id="rId2"/>
+    <p:sldId id="257" r:id="rId3"/>
+    <p:sldId id="258" r:id="rId4"/>
+    <p:sldId id="259" r:id="rId5"/>
+    <p:sldId id="260" r:id="rId6"/>
+    <p:sldId id="261" r:id="rId7"/>
+    <p:sldId id="279" r:id="rId8"/>
+    <p:sldId id="269" r:id="rId9"/>
+    <p:sldId id="270" r:id="rId10"/>
+    <p:sldId id="274" r:id="rId11"/>
+    <p:sldId id="275" r:id="rId12"/>
+    <p:sldId id="276" r:id="rId13"/>
+    <p:sldId id="277" r:id="rId14"/>
+    <p:sldId id="271" r:id="rId15"/>
+    <p:sldId id="278" r:id="rId16"/>
+    <p:sldId id="272" r:id="rId17"/>
+    <p:sldId id="263" r:id="rId18"/>
+    <p:sldId id="264" r:id="rId19"/>
+    <p:sldId id="265" r:id="rId20"/>
+    <p:sldId id="266" r:id="rId21"/>
   </p:sldIdLst>
   <p:sldSz cx="9144000" cy="5143500" type="screen16x9"/>
   <p:notesSz cx="5143500" cy="9144000"/>
   <p:custDataLst>
-    <p:tags r:id="rId24"/>
+    <p:tags r:id="rId23"/>
   </p:custDataLst>
   <p:defaultTextStyle>
     <a:lvl1pPr marL="0" algn="l" defTabSz="914400" rtl="0" eaLnBrk="1" latinLnBrk="0" hangingPunct="1">
@@ -1051,7 +1050,7 @@
           <a:p>
             <a:fld id="{F7021451-1387-4CA6-816F-3879F97B5CBC}" type="slidenum">
               <a:rPr lang="en-US"/>
-              <a:t>21</a:t>
+              <a:t>20</a:t>
             </a:fld>
             <a:endParaRPr lang="en-US"/>
           </a:p>
@@ -1135,7 +1134,7 @@
           <a:p>
             <a:fld id="{F7021451-1387-4CA6-816F-3879F97B5CBC}" type="slidenum">
               <a:rPr lang="en-US"/>
-              <a:t>3</a:t>
+              <a:t>2</a:t>
             </a:fld>
             <a:endParaRPr lang="en-US"/>
           </a:p>
@@ -1219,7 +1218,7 @@
           <a:p>
             <a:fld id="{F7021451-1387-4CA6-816F-3879F97B5CBC}" type="slidenum">
               <a:rPr lang="en-US"/>
-              <a:t>4</a:t>
+              <a:t>3</a:t>
             </a:fld>
             <a:endParaRPr lang="en-US"/>
           </a:p>
@@ -1303,7 +1302,7 @@
           <a:p>
             <a:fld id="{F7021451-1387-4CA6-816F-3879F97B5CBC}" type="slidenum">
               <a:rPr lang="en-US"/>
-              <a:t>5</a:t>
+              <a:t>4</a:t>
             </a:fld>
             <a:endParaRPr lang="en-US"/>
           </a:p>
@@ -1387,7 +1386,7 @@
           <a:p>
             <a:fld id="{F7021451-1387-4CA6-816F-3879F97B5CBC}" type="slidenum">
               <a:rPr lang="en-US"/>
-              <a:t>6</a:t>
+              <a:t>5</a:t>
             </a:fld>
             <a:endParaRPr lang="en-US"/>
           </a:p>
@@ -1471,7 +1470,7 @@
           <a:p>
             <a:fld id="{F7021451-1387-4CA6-816F-3879F97B5CBC}" type="slidenum">
               <a:rPr lang="en-US"/>
-              <a:t>7</a:t>
+              <a:t>6</a:t>
             </a:fld>
             <a:endParaRPr lang="en-US"/>
           </a:p>
@@ -1555,7 +1554,7 @@
           <a:p>
             <a:fld id="{F7021451-1387-4CA6-816F-3879F97B5CBC}" type="slidenum">
               <a:rPr lang="en-US"/>
-              <a:t>18</a:t>
+              <a:t>17</a:t>
             </a:fld>
             <a:endParaRPr lang="en-US"/>
           </a:p>
@@ -1639,7 +1638,7 @@
           <a:p>
             <a:fld id="{F7021451-1387-4CA6-816F-3879F97B5CBC}" type="slidenum">
               <a:rPr lang="en-US"/>
-              <a:t>19</a:t>
+              <a:t>18</a:t>
             </a:fld>
             <a:endParaRPr lang="en-US"/>
           </a:p>
@@ -1723,7 +1722,7 @@
           <a:p>
             <a:fld id="{F7021451-1387-4CA6-816F-3879F97B5CBC}" type="slidenum">
               <a:rPr lang="en-US"/>
-              <a:t>20</a:t>
+              <a:t>19</a:t>
             </a:fld>
             <a:endParaRPr lang="en-US"/>
           </a:p>
@@ -3859,7 +3858,7 @@
         </p:nvSpPr>
         <p:spPr>
           <a:xfrm>
-            <a:off x="854979" y="3645023"/>
+            <a:off x="5330968" y="4287347"/>
             <a:ext cx="1633432" cy="154209"/>
           </a:xfrm>
           <a:prstGeom prst="rect">
@@ -3903,8 +3902,8 @@
         </p:nvSpPr>
         <p:spPr>
           <a:xfrm>
-            <a:off x="854979" y="3806607"/>
-            <a:ext cx="1633432" cy="227435"/>
+            <a:off x="5362194" y="4472279"/>
+            <a:ext cx="1633432" cy="483915"/>
           </a:xfrm>
           <a:prstGeom prst="rect">
             <a:avLst/>
@@ -3933,6 +3932,22 @@
               </a:rPr>
               <a:t>Vartika Mishra</a:t>
             </a:r>
+          </a:p>
+          <a:p>
+            <a:pPr>
+              <a:lnSpc>
+                <a:spcPts val="2038"/>
+              </a:lnSpc>
+            </a:pPr>
+            <a:endParaRPr lang="en-US" sz="1200" b="1" dirty="0">
+              <a:solidFill>
+                <a:srgbClr val="0D358D"/>
+              </a:solidFill>
+              <a:latin typeface="Arial" panose="020B0604020202020204" pitchFamily="34" charset="0"/>
+              <a:ea typeface="Aileron Bold"/>
+              <a:cs typeface="Arial" panose="020B0604020202020204" pitchFamily="34" charset="0"/>
+              <a:sym typeface="Aileron Bold"/>
+            </a:endParaRPr>
           </a:p>
         </p:txBody>
       </p:sp>
@@ -3959,7 +3974,7 @@
         </p:blipFill>
         <p:spPr>
           <a:xfrm>
-            <a:off x="429808" y="3639905"/>
+            <a:off x="4940930" y="4408464"/>
             <a:ext cx="395331" cy="381795"/>
           </a:xfrm>
           <a:prstGeom prst="rect">
@@ -3981,7 +3996,7 @@
         </p:nvSpPr>
         <p:spPr>
           <a:xfrm>
-            <a:off x="3176086" y="3642226"/>
+            <a:off x="2628833" y="4341881"/>
             <a:ext cx="1809978" cy="154209"/>
           </a:xfrm>
           <a:prstGeom prst="rect">
@@ -4025,8 +4040,8 @@
         </p:nvSpPr>
         <p:spPr>
           <a:xfrm>
-            <a:off x="3176086" y="3803810"/>
-            <a:ext cx="2272871" cy="227435"/>
+            <a:off x="2566486" y="4461904"/>
+            <a:ext cx="2272871" cy="483915"/>
           </a:xfrm>
           <a:prstGeom prst="rect">
             <a:avLst/>
@@ -4055,6 +4070,22 @@
               </a:rPr>
               <a:t>vartikamishra2018@gmail.com</a:t>
             </a:r>
+          </a:p>
+          <a:p>
+            <a:pPr>
+              <a:lnSpc>
+                <a:spcPts val="2038"/>
+              </a:lnSpc>
+            </a:pPr>
+            <a:endParaRPr lang="en-US" sz="1200" b="1" dirty="0">
+              <a:solidFill>
+                <a:srgbClr val="0D358D"/>
+              </a:solidFill>
+              <a:latin typeface="Arial" panose="020B0604020202020204" pitchFamily="34" charset="0"/>
+              <a:ea typeface="Aileron Bold"/>
+              <a:cs typeface="Arial" panose="020B0604020202020204" pitchFamily="34" charset="0"/>
+              <a:sym typeface="Aileron Bold"/>
+            </a:endParaRPr>
           </a:p>
         </p:txBody>
       </p:sp>
@@ -4081,7 +4112,7 @@
         </p:blipFill>
         <p:spPr>
           <a:xfrm>
-            <a:off x="2747249" y="3631981"/>
+            <a:off x="2141340" y="4235613"/>
             <a:ext cx="398279" cy="389719"/>
           </a:xfrm>
           <a:prstGeom prst="rect">
@@ -4104,9 +4135,9 @@
         <p:grpSpPr>
           <a:xfrm>
             <a:off x="860459" y="4337076"/>
-            <a:ext cx="2272871" cy="389019"/>
+            <a:ext cx="2272871" cy="645499"/>
             <a:chOff x="3139699" y="4295282"/>
-            <a:chExt cx="2272871" cy="389019"/>
+            <a:chExt cx="2272871" cy="645499"/>
           </a:xfrm>
         </p:grpSpPr>
         <p:sp>
@@ -4168,7 +4199,7 @@
           <p:spPr>
             <a:xfrm>
               <a:off x="3139699" y="4456866"/>
-              <a:ext cx="2272871" cy="227435"/>
+              <a:ext cx="2272871" cy="483915"/>
             </a:xfrm>
             <a:prstGeom prst="rect">
               <a:avLst/>
@@ -4197,6 +4228,22 @@
                 </a:rPr>
                 <a:t>UmaMaheshwari</a:t>
               </a:r>
+            </a:p>
+            <a:p>
+              <a:pPr>
+                <a:lnSpc>
+                  <a:spcPts val="2038"/>
+                </a:lnSpc>
+              </a:pPr>
+              <a:endParaRPr lang="en-US" sz="1200" b="1" dirty="0">
+                <a:solidFill>
+                  <a:srgbClr val="0D358D"/>
+                </a:solidFill>
+                <a:latin typeface="Arial" panose="020B0604020202020204" pitchFamily="34" charset="0"/>
+                <a:ea typeface="Aileron Bold"/>
+                <a:cs typeface="Arial" panose="020B0604020202020204" pitchFamily="34" charset="0"/>
+                <a:sym typeface="Aileron Bold"/>
+              </a:endParaRPr>
             </a:p>
           </p:txBody>
         </p:sp>
@@ -4476,13 +4523,128 @@
           </a:prstGeom>
         </p:spPr>
       </p:pic>
+      <p:graphicFrame>
+        <p:nvGraphicFramePr>
+          <p:cNvPr id="26" name="Table 25">
+            <a:extLst>
+              <a:ext uri="{FF2B5EF4-FFF2-40B4-BE49-F238E27FC236}">
+                <a16:creationId xmlns:a16="http://schemas.microsoft.com/office/drawing/2014/main" id="{C81DED0E-8121-4A62-5E99-A69B8B50AA1B}"/>
+              </a:ext>
+            </a:extLst>
+          </p:cNvPr>
+          <p:cNvGraphicFramePr>
+            <a:graphicFrameLocks noGrp="1"/>
+          </p:cNvGraphicFramePr>
+          <p:nvPr>
+            <p:extLst>
+              <p:ext uri="{D42A27DB-BD31-4B8C-83A1-F6EECF244321}">
+                <p14:modId xmlns:p14="http://schemas.microsoft.com/office/powerpoint/2010/main" val="2707402554"/>
+              </p:ext>
+            </p:extLst>
+          </p:nvPr>
+        </p:nvGraphicFramePr>
+        <p:xfrm>
+          <a:off x="4663" y="3463064"/>
+          <a:ext cx="4936267" cy="1158240"/>
+        </p:xfrm>
+        <a:graphic>
+          <a:graphicData uri="http://schemas.openxmlformats.org/drawingml/2006/table">
+            <a:tbl>
+              <a:tblPr>
+                <a:tableStyleId>{2D5ABB26-0587-4C30-8999-92F81FD0307C}</a:tableStyleId>
+              </a:tblPr>
+              <a:tblGrid>
+                <a:gridCol w="4936267">
+                  <a:extLst>
+                    <a:ext uri="{9D8B030D-6E8A-4147-A177-3AD203B41FA5}">
+                      <a16:colId xmlns:a16="http://schemas.microsoft.com/office/drawing/2014/main" val="3438802165"/>
+                    </a:ext>
+                  </a:extLst>
+                </a:gridCol>
+              </a:tblGrid>
+              <a:tr h="370840">
+                <a:tc>
+                  <a:txBody>
+                    <a:bodyPr/>
+                    <a:lstStyle/>
+                    <a:p>
+                      <a:pPr algn="ctr"/>
+                      <a:r>
+                        <a:rPr lang="en-IN" sz="1400" b="1" kern="1200" dirty="0">
+                          <a:solidFill>
+                            <a:srgbClr val="0D358D"/>
+                          </a:solidFill>
+                          <a:latin typeface="Arial" panose="020B0604020202020204" pitchFamily="34" charset="0"/>
+                          <a:cs typeface="Arial" panose="020B0604020202020204" pitchFamily="34" charset="0"/>
+                        </a:rPr>
+                        <a:t>Project Title- </a:t>
+                      </a:r>
+                      <a:r>
+                        <a:rPr lang="en-IN" sz="1400" b="1" dirty="0">
+                          <a:solidFill>
+                            <a:schemeClr val="accent1">
+                              <a:lumMod val="75000"/>
+                            </a:schemeClr>
+                          </a:solidFill>
+                          <a:latin typeface="Arial" panose="020B0604020202020204" pitchFamily="34" charset="0"/>
+                          <a:ea typeface="Tahoma" panose="020B0604030504040204" pitchFamily="34" charset="0"/>
+                          <a:cs typeface="Arial" panose="020B0604020202020204" pitchFamily="34" charset="0"/>
+                        </a:rPr>
+                        <a:t>A Comprehensive Educational Analytics System for Evaluating Teaching Performance via Student Feedback</a:t>
+                      </a:r>
+                      <a:endParaRPr lang="en-IN" sz="1400" dirty="0">
+                        <a:solidFill>
+                          <a:schemeClr val="accent1">
+                            <a:lumMod val="75000"/>
+                          </a:schemeClr>
+                        </a:solidFill>
+                        <a:latin typeface="Arial" panose="020B0604020202020204" pitchFamily="34" charset="0"/>
+                        <a:ea typeface="Tahoma" panose="020B0604030504040204" pitchFamily="34" charset="0"/>
+                        <a:cs typeface="Arial" panose="020B0604020202020204" pitchFamily="34" charset="0"/>
+                      </a:endParaRPr>
+                    </a:p>
+                    <a:p>
+                      <a:pPr algn="ctr"/>
+                      <a:endParaRPr lang="en-IN" sz="1400" dirty="0">
+                        <a:solidFill>
+                          <a:schemeClr val="accent1">
+                            <a:lumMod val="75000"/>
+                          </a:schemeClr>
+                        </a:solidFill>
+                        <a:latin typeface="Arial" panose="020B0604020202020204" pitchFamily="34" charset="0"/>
+                        <a:ea typeface="Tahoma" panose="020B0604030504040204" pitchFamily="34" charset="0"/>
+                        <a:cs typeface="Arial" panose="020B0604020202020204" pitchFamily="34" charset="0"/>
+                      </a:endParaRPr>
+                    </a:p>
+                    <a:p>
+                      <a:endParaRPr lang="en-IN" sz="1400" b="1" kern="1200" dirty="0">
+                        <a:solidFill>
+                          <a:srgbClr val="0D358D"/>
+                        </a:solidFill>
+                        <a:latin typeface="Arial" panose="020B0604020202020204" pitchFamily="34" charset="0"/>
+                        <a:cs typeface="Arial" panose="020B0604020202020204" pitchFamily="34" charset="0"/>
+                      </a:endParaRPr>
+                    </a:p>
+                  </a:txBody>
+                  <a:tcPr/>
+                </a:tc>
+                <a:extLst>
+                  <a:ext uri="{0D108BD9-81ED-4DB2-BD59-A6C34878D82A}">
+                    <a16:rowId xmlns:a16="http://schemas.microsoft.com/office/drawing/2014/main" val="2841395308"/>
+                  </a:ext>
+                </a:extLst>
+              </a:tr>
+            </a:tbl>
+          </a:graphicData>
+        </a:graphic>
+      </p:graphicFrame>
     </p:spTree>
     <p:custDataLst>
       <p:tags r:id="rId1"/>
     </p:custDataLst>
     <p:extLst>
       <p:ext uri="{BB962C8B-B14F-4D97-AF65-F5344CB8AC3E}">
-        <p14:creationId xmlns:p14="http://schemas.microsoft.com/office/powerpoint/2010/main" val="121223606"/>
+        <p14:creationId xmlns:p14="http://schemas.microsoft.com/office/powerpoint/2010/main" val="1253679387"/>
       </p:ext>
     </p:extLst>
   </p:cSld>
@@ -4493,105 +4655,6 @@
 </file>
 
 <file path=ppt/slides/slide10.xml><?xml version="1.0" encoding="utf-8"?>
-<p:sld xmlns:a="http://schemas.openxmlformats.org/drawingml/2006/main" xmlns:r="http://schemas.openxmlformats.org/officeDocument/2006/relationships" xmlns:p="http://schemas.openxmlformats.org/presentationml/2006/main">
-  <p:cSld>
-    <p:spTree>
-      <p:nvGrpSpPr>
-        <p:cNvPr id="1" name=""/>
-        <p:cNvGrpSpPr/>
-        <p:nvPr/>
-      </p:nvGrpSpPr>
-      <p:grpSpPr>
-        <a:xfrm>
-          <a:off x="0" y="0"/>
-          <a:ext cx="0" cy="0"/>
-          <a:chOff x="0" y="0"/>
-          <a:chExt cx="0" cy="0"/>
-        </a:xfrm>
-      </p:grpSpPr>
-      <p:pic>
-        <p:nvPicPr>
-          <p:cNvPr id="3" name="Picture 2">
-            <a:extLst>
-              <a:ext uri="{FF2B5EF4-FFF2-40B4-BE49-F238E27FC236}">
-                <a16:creationId xmlns:a16="http://schemas.microsoft.com/office/drawing/2014/main" id="{7ED0D84F-9D45-666D-1574-02750813FEFB}"/>
-              </a:ext>
-            </a:extLst>
-          </p:cNvPr>
-          <p:cNvPicPr>
-            <a:picLocks noChangeAspect="1"/>
-          </p:cNvPicPr>
-          <p:nvPr/>
-        </p:nvPicPr>
-        <p:blipFill>
-          <a:blip r:embed="rId2"/>
-          <a:stretch>
-            <a:fillRect/>
-          </a:stretch>
-        </p:blipFill>
-        <p:spPr>
-          <a:xfrm>
-            <a:off x="0" y="954484"/>
-            <a:ext cx="9144000" cy="4073779"/>
-          </a:xfrm>
-          <a:prstGeom prst="rect">
-            <a:avLst/>
-          </a:prstGeom>
-        </p:spPr>
-      </p:pic>
-      <p:sp>
-        <p:nvSpPr>
-          <p:cNvPr id="4" name="TextBox 3">
-            <a:extLst>
-              <a:ext uri="{FF2B5EF4-FFF2-40B4-BE49-F238E27FC236}">
-                <a16:creationId xmlns:a16="http://schemas.microsoft.com/office/drawing/2014/main" id="{893E54F0-7FB2-DED8-DE94-08428149F6FC}"/>
-              </a:ext>
-            </a:extLst>
-          </p:cNvPr>
-          <p:cNvSpPr txBox="1"/>
-          <p:nvPr/>
-        </p:nvSpPr>
-        <p:spPr>
-          <a:xfrm>
-            <a:off x="1013460" y="369709"/>
-            <a:ext cx="7254240" cy="523220"/>
-          </a:xfrm>
-          <a:prstGeom prst="rect">
-            <a:avLst/>
-          </a:prstGeom>
-          <a:noFill/>
-        </p:spPr>
-        <p:txBody>
-          <a:bodyPr wrap="square" rtlCol="0">
-            <a:spAutoFit/>
-          </a:bodyPr>
-          <a:lstStyle/>
-          <a:p>
-            <a:pPr algn="ctr"/>
-            <a:r>
-              <a:rPr lang="en-IN" sz="2800" b="1" dirty="0">
-                <a:latin typeface="Times New Roman" panose="02020603050405020304" pitchFamily="18" charset="0"/>
-                <a:cs typeface="Times New Roman" panose="02020603050405020304" pitchFamily="18" charset="0"/>
-              </a:rPr>
-              <a:t>Cleaned Data Set</a:t>
-            </a:r>
-          </a:p>
-        </p:txBody>
-      </p:sp>
-    </p:spTree>
-    <p:extLst>
-      <p:ext uri="{BB962C8B-B14F-4D97-AF65-F5344CB8AC3E}">
-        <p14:creationId xmlns:p14="http://schemas.microsoft.com/office/powerpoint/2010/main" val="1178234491"/>
-      </p:ext>
-    </p:extLst>
-  </p:cSld>
-  <p:clrMapOvr>
-    <a:masterClrMapping/>
-  </p:clrMapOvr>
-</p:sld>
-</file>
-
-<file path=ppt/slides/slide11.xml><?xml version="1.0" encoding="utf-8"?>
 <p:sld xmlns:a="http://schemas.openxmlformats.org/drawingml/2006/main" xmlns:r="http://schemas.openxmlformats.org/officeDocument/2006/relationships" xmlns:p="http://schemas.openxmlformats.org/presentationml/2006/main">
   <p:cSld>
     <p:spTree>
@@ -4709,7 +4772,7 @@
 </p:sld>
 </file>
 
-<file path=ppt/slides/slide12.xml><?xml version="1.0" encoding="utf-8"?>
+<file path=ppt/slides/slide11.xml><?xml version="1.0" encoding="utf-8"?>
 <p:sld xmlns:a="http://schemas.openxmlformats.org/drawingml/2006/main" xmlns:r="http://schemas.openxmlformats.org/officeDocument/2006/relationships" xmlns:p="http://schemas.openxmlformats.org/presentationml/2006/main">
   <p:cSld>
     <p:spTree>
@@ -4810,7 +4873,7 @@
 </p:sld>
 </file>
 
-<file path=ppt/slides/slide13.xml><?xml version="1.0" encoding="utf-8"?>
+<file path=ppt/slides/slide12.xml><?xml version="1.0" encoding="utf-8"?>
 <p:sld xmlns:a="http://schemas.openxmlformats.org/drawingml/2006/main" xmlns:r="http://schemas.openxmlformats.org/officeDocument/2006/relationships" xmlns:p="http://schemas.openxmlformats.org/presentationml/2006/main">
   <p:cSld>
     <p:spTree>
@@ -4928,7 +4991,7 @@
 </p:sld>
 </file>
 
-<file path=ppt/slides/slide14.xml><?xml version="1.0" encoding="utf-8"?>
+<file path=ppt/slides/slide13.xml><?xml version="1.0" encoding="utf-8"?>
 <p:sld xmlns:a="http://schemas.openxmlformats.org/drawingml/2006/main" xmlns:r="http://schemas.openxmlformats.org/officeDocument/2006/relationships" xmlns:p="http://schemas.openxmlformats.org/presentationml/2006/main">
   <p:cSld>
     <p:spTree>
@@ -5046,7 +5109,7 @@
 </p:sld>
 </file>
 
-<file path=ppt/slides/slide15.xml><?xml version="1.0" encoding="utf-8"?>
+<file path=ppt/slides/slide14.xml><?xml version="1.0" encoding="utf-8"?>
 <p:sld xmlns:a="http://schemas.openxmlformats.org/drawingml/2006/main" xmlns:r="http://schemas.openxmlformats.org/officeDocument/2006/relationships" xmlns:p="http://schemas.openxmlformats.org/presentationml/2006/main">
   <p:cSld>
     <p:spTree>
@@ -5146,7 +5209,7 @@
 </p:sld>
 </file>
 
-<file path=ppt/slides/slide16.xml><?xml version="1.0" encoding="utf-8"?>
+<file path=ppt/slides/slide15.xml><?xml version="1.0" encoding="utf-8"?>
 <p:sld xmlns:a="http://schemas.openxmlformats.org/drawingml/2006/main" xmlns:r="http://schemas.openxmlformats.org/officeDocument/2006/relationships" xmlns:p="http://schemas.openxmlformats.org/presentationml/2006/main">
   <p:cSld>
     <p:spTree>
@@ -5264,7 +5327,7 @@
 </p:sld>
 </file>
 
-<file path=ppt/slides/slide17.xml><?xml version="1.0" encoding="utf-8"?>
+<file path=ppt/slides/slide16.xml><?xml version="1.0" encoding="utf-8"?>
 <p:sld xmlns:a="http://schemas.openxmlformats.org/drawingml/2006/main" xmlns:r="http://schemas.openxmlformats.org/officeDocument/2006/relationships" xmlns:p="http://schemas.openxmlformats.org/presentationml/2006/main">
   <p:cSld>
     <p:spTree>
@@ -5397,7 +5460,7 @@
 </p:sld>
 </file>
 
-<file path=ppt/slides/slide18.xml><?xml version="1.0" encoding="utf-8"?>
+<file path=ppt/slides/slide17.xml><?xml version="1.0" encoding="utf-8"?>
 <p:sld xmlns:a="http://schemas.openxmlformats.org/drawingml/2006/main" xmlns:r="http://schemas.openxmlformats.org/officeDocument/2006/relationships" xmlns:p="http://schemas.openxmlformats.org/presentationml/2006/main">
   <p:cSld name="Slide 8">
     <p:bg>
@@ -5749,7 +5812,7 @@
 </p:sld>
 </file>
 
-<file path=ppt/slides/slide19.xml><?xml version="1.0" encoding="utf-8"?>
+<file path=ppt/slides/slide18.xml><?xml version="1.0" encoding="utf-8"?>
 <p:sld xmlns:a="http://schemas.openxmlformats.org/drawingml/2006/main" xmlns:r="http://schemas.openxmlformats.org/officeDocument/2006/relationships" xmlns:p="http://schemas.openxmlformats.org/presentationml/2006/main">
   <p:cSld name="Slide 9">
     <p:bg>
@@ -6101,105 +6164,7 @@
 </p:sld>
 </file>
 
-<file path=ppt/slides/slide2.xml><?xml version="1.0" encoding="utf-8"?>
-<p:sld xmlns:a="http://schemas.openxmlformats.org/drawingml/2006/main" xmlns:r="http://schemas.openxmlformats.org/officeDocument/2006/relationships" xmlns:p="http://schemas.openxmlformats.org/presentationml/2006/main">
-  <p:cSld>
-    <p:spTree>
-      <p:nvGrpSpPr>
-        <p:cNvPr id="1" name=""/>
-        <p:cNvGrpSpPr/>
-        <p:nvPr/>
-      </p:nvGrpSpPr>
-      <p:grpSpPr>
-        <a:xfrm>
-          <a:off x="0" y="0"/>
-          <a:ext cx="0" cy="0"/>
-          <a:chOff x="0" y="0"/>
-          <a:chExt cx="0" cy="0"/>
-        </a:xfrm>
-      </p:grpSpPr>
-      <p:sp>
-        <p:nvSpPr>
-          <p:cNvPr id="2" name="TextBox 1">
-            <a:extLst>
-              <a:ext uri="{FF2B5EF4-FFF2-40B4-BE49-F238E27FC236}">
-                <a16:creationId xmlns:a16="http://schemas.microsoft.com/office/drawing/2014/main" id="{D9977AD8-A02F-7894-8BC6-D0F37FB19D48}"/>
-              </a:ext>
-            </a:extLst>
-          </p:cNvPr>
-          <p:cNvSpPr txBox="1"/>
-          <p:nvPr/>
-        </p:nvSpPr>
-        <p:spPr>
-          <a:xfrm>
-            <a:off x="662940" y="1028700"/>
-            <a:ext cx="7894320" cy="3477875"/>
-          </a:xfrm>
-          <a:prstGeom prst="rect">
-            <a:avLst/>
-          </a:prstGeom>
-          <a:noFill/>
-        </p:spPr>
-        <p:txBody>
-          <a:bodyPr wrap="square" rtlCol="0">
-            <a:spAutoFit/>
-          </a:bodyPr>
-          <a:lstStyle/>
-          <a:p>
-            <a:pPr algn="ctr"/>
-            <a:r>
-              <a:rPr lang="en-IN" sz="4400" b="1" dirty="0">
-                <a:solidFill>
-                  <a:schemeClr val="accent1">
-                    <a:lumMod val="75000"/>
-                  </a:schemeClr>
-                </a:solidFill>
-                <a:latin typeface="Times New Roman" panose="02020603050405020304" pitchFamily="18" charset="0"/>
-                <a:ea typeface="Tahoma" panose="020B0604030504040204" pitchFamily="34" charset="0"/>
-                <a:cs typeface="Times New Roman" panose="02020603050405020304" pitchFamily="18" charset="0"/>
-              </a:rPr>
-              <a:t>A Comprehensive Educational Analytics System for Evaluating Teaching Performance via Student Feedback</a:t>
-            </a:r>
-            <a:endParaRPr lang="en-IN" sz="4400" dirty="0">
-              <a:solidFill>
-                <a:schemeClr val="accent1">
-                  <a:lumMod val="75000"/>
-                </a:schemeClr>
-              </a:solidFill>
-              <a:latin typeface="Times New Roman" panose="02020603050405020304" pitchFamily="18" charset="0"/>
-              <a:ea typeface="Tahoma" panose="020B0604030504040204" pitchFamily="34" charset="0"/>
-              <a:cs typeface="Times New Roman" panose="02020603050405020304" pitchFamily="18" charset="0"/>
-            </a:endParaRPr>
-          </a:p>
-          <a:p>
-            <a:pPr algn="ctr"/>
-            <a:endParaRPr lang="en-IN" sz="4400" dirty="0">
-              <a:solidFill>
-                <a:schemeClr val="accent1">
-                  <a:lumMod val="75000"/>
-                </a:schemeClr>
-              </a:solidFill>
-              <a:latin typeface="Times New Roman" panose="02020603050405020304" pitchFamily="18" charset="0"/>
-              <a:ea typeface="Tahoma" panose="020B0604030504040204" pitchFamily="34" charset="0"/>
-              <a:cs typeface="Times New Roman" panose="02020603050405020304" pitchFamily="18" charset="0"/>
-            </a:endParaRPr>
-          </a:p>
-        </p:txBody>
-      </p:sp>
-    </p:spTree>
-    <p:extLst>
-      <p:ext uri="{BB962C8B-B14F-4D97-AF65-F5344CB8AC3E}">
-        <p14:creationId xmlns:p14="http://schemas.microsoft.com/office/powerpoint/2010/main" val="1013769868"/>
-      </p:ext>
-    </p:extLst>
-  </p:cSld>
-  <p:clrMapOvr>
-    <a:masterClrMapping/>
-  </p:clrMapOvr>
-</p:sld>
-</file>
-
-<file path=ppt/slides/slide20.xml><?xml version="1.0" encoding="utf-8"?>
+<file path=ppt/slides/slide19.xml><?xml version="1.0" encoding="utf-8"?>
 <p:sld xmlns:a="http://schemas.openxmlformats.org/drawingml/2006/main" xmlns:r="http://schemas.openxmlformats.org/officeDocument/2006/relationships" xmlns:p="http://schemas.openxmlformats.org/presentationml/2006/main">
   <p:cSld name="Slide 10">
     <p:spTree>
@@ -6814,184 +6779,7 @@
 </p:sld>
 </file>
 
-<file path=ppt/slides/slide21.xml><?xml version="1.0" encoding="utf-8"?>
-<p:sld xmlns:a="http://schemas.openxmlformats.org/drawingml/2006/main" xmlns:r="http://schemas.openxmlformats.org/officeDocument/2006/relationships" xmlns:p="http://schemas.openxmlformats.org/presentationml/2006/main">
-  <p:cSld name="Slide 11">
-    <p:bg>
-      <p:bgPr>
-        <a:solidFill>
-          <a:srgbClr val="FFFFFF"/>
-        </a:solidFill>
-        <a:effectLst/>
-      </p:bgPr>
-    </p:bg>
-    <p:spTree>
-      <p:nvGrpSpPr>
-        <p:cNvPr id="1" name=""/>
-        <p:cNvGrpSpPr/>
-        <p:nvPr/>
-      </p:nvGrpSpPr>
-      <p:grpSpPr>
-        <a:xfrm>
-          <a:off x="0" y="0"/>
-          <a:ext cx="0" cy="0"/>
-          <a:chOff x="0" y="0"/>
-          <a:chExt cx="0" cy="0"/>
-        </a:xfrm>
-      </p:grpSpPr>
-      <p:sp>
-        <p:nvSpPr>
-          <p:cNvPr id="5" name="Text 3"/>
-          <p:cNvSpPr/>
-          <p:nvPr/>
-        </p:nvSpPr>
-        <p:spPr>
-          <a:xfrm>
-            <a:off x="914400" y="3017520"/>
-            <a:ext cx="7315200" cy="411480"/>
-          </a:xfrm>
-          <a:prstGeom prst="rect">
-            <a:avLst/>
-          </a:prstGeom>
-          <a:noFill/>
-          <a:ln/>
-        </p:spPr>
-        <p:txBody>
-          <a:bodyPr wrap="square" rtlCol="0" anchor="ctr"/>
-          <a:lstStyle/>
-          <a:p>
-            <a:pPr marL="0" indent="0" algn="ctr">
-              <a:buNone/>
-            </a:pPr>
-            <a:r>
-              <a:rPr lang="en-US" sz="1400" kern="0" spc="200" dirty="0">
-                <a:latin typeface="Lato" panose="020F0502020204030203" pitchFamily="34" charset="0"/>
-                <a:ea typeface="Calibri" pitchFamily="34" charset="-122"/>
-                <a:cs typeface="Arial" panose="020B0604020202020204" pitchFamily="34" charset="0"/>
-              </a:rPr>
-              <a:t>AICW Fellowship  |  Student Project Presentation 2026</a:t>
-            </a:r>
-            <a:endParaRPr lang="en-US" sz="1400" dirty="0">
-              <a:latin typeface="Lato" panose="020F0502020204030203" pitchFamily="34" charset="0"/>
-              <a:cs typeface="Arial" panose="020B0604020202020204" pitchFamily="34" charset="0"/>
-            </a:endParaRPr>
-          </a:p>
-        </p:txBody>
-      </p:sp>
-      <p:sp>
-        <p:nvSpPr>
-          <p:cNvPr id="6" name="Text 4"/>
-          <p:cNvSpPr/>
-          <p:nvPr/>
-        </p:nvSpPr>
-        <p:spPr>
-          <a:xfrm>
-            <a:off x="914400" y="3566160"/>
-            <a:ext cx="7315200" cy="320040"/>
-          </a:xfrm>
-          <a:prstGeom prst="rect">
-            <a:avLst/>
-          </a:prstGeom>
-          <a:noFill/>
-          <a:ln/>
-        </p:spPr>
-        <p:txBody>
-          <a:bodyPr wrap="square" lIns="91440" tIns="45720" rIns="91440" bIns="45720" rtlCol="0" anchor="ctr"/>
-          <a:lstStyle/>
-          <a:p>
-            <a:pPr marL="0" indent="0" algn="ctr">
-              <a:buNone/>
-            </a:pPr>
-            <a:r>
-              <a:rPr lang="en-US" sz="1100" dirty="0">
-                <a:latin typeface="Lato" panose="020F0502020204030203" pitchFamily="34" charset="0"/>
-                <a:ea typeface="Calibri"/>
-                <a:cs typeface="Arial" panose="020B0604020202020204" pitchFamily="34" charset="0"/>
-              </a:rPr>
-              <a:t>  LinkedIn  |   </a:t>
-            </a:r>
-            <a:r>
-              <a:rPr lang="en-US" sz="1100" dirty="0" err="1">
-                <a:latin typeface="Lato" panose="020F0502020204030203" pitchFamily="34" charset="0"/>
-                <a:ea typeface="Calibri"/>
-                <a:cs typeface="Arial" panose="020B0604020202020204" pitchFamily="34" charset="0"/>
-              </a:rPr>
-              <a:t>Edunet</a:t>
-            </a:r>
-            <a:r>
-              <a:rPr lang="en-US" sz="1100" dirty="0">
-                <a:latin typeface="Lato" panose="020F0502020204030203" pitchFamily="34" charset="0"/>
-                <a:ea typeface="Calibri"/>
-                <a:cs typeface="Arial" panose="020B0604020202020204" pitchFamily="34" charset="0"/>
-              </a:rPr>
-              <a:t> Foundation</a:t>
-            </a:r>
-            <a:endParaRPr lang="en-US" sz="1100" dirty="0">
-              <a:latin typeface="Lato" panose="020F0502020204030203" pitchFamily="34" charset="0"/>
-              <a:cs typeface="Arial" panose="020B0604020202020204" pitchFamily="34" charset="0"/>
-            </a:endParaRPr>
-          </a:p>
-        </p:txBody>
-      </p:sp>
-      <p:sp>
-        <p:nvSpPr>
-          <p:cNvPr id="9" name="TextBox 4">
-            <a:extLst>
-              <a:ext uri="{FF2B5EF4-FFF2-40B4-BE49-F238E27FC236}">
-                <a16:creationId xmlns:a16="http://schemas.microsoft.com/office/drawing/2014/main" id="{F7A740B1-0782-B37E-5F62-503024E32BC9}"/>
-              </a:ext>
-            </a:extLst>
-          </p:cNvPr>
-          <p:cNvSpPr txBox="1"/>
-          <p:nvPr/>
-        </p:nvSpPr>
-        <p:spPr>
-          <a:xfrm>
-            <a:off x="2632982" y="1705295"/>
-            <a:ext cx="3878036" cy="1175065"/>
-          </a:xfrm>
-          <a:prstGeom prst="rect">
-            <a:avLst/>
-          </a:prstGeom>
-        </p:spPr>
-        <p:txBody>
-          <a:bodyPr wrap="square" lIns="0" tIns="0" rIns="0" bIns="0" rtlCol="0" anchor="t">
-            <a:spAutoFit/>
-          </a:bodyPr>
-          <a:lstStyle/>
-          <a:p>
-            <a:pPr algn="ctr">
-              <a:lnSpc>
-                <a:spcPts val="10686"/>
-              </a:lnSpc>
-            </a:pPr>
-            <a:r>
-              <a:rPr lang="en-US" sz="5000" b="1" dirty="0">
-                <a:solidFill>
-                  <a:srgbClr val="0D358D"/>
-                </a:solidFill>
-                <a:latin typeface="Lato" panose="020F0502020204030203" pitchFamily="34" charset="0"/>
-                <a:ea typeface="Aileron Ultra-Bold"/>
-                <a:cs typeface="Arial" panose="020B0604020202020204" pitchFamily="34" charset="0"/>
-                <a:sym typeface="Aileron Ultra-Bold"/>
-              </a:rPr>
-              <a:t>Thank You</a:t>
-            </a:r>
-          </a:p>
-        </p:txBody>
-      </p:sp>
-    </p:spTree>
-    <p:custDataLst>
-      <p:tags r:id="rId1"/>
-    </p:custDataLst>
-  </p:cSld>
-  <p:clrMapOvr>
-    <a:masterClrMapping/>
-  </p:clrMapOvr>
-</p:sld>
-</file>
-
-<file path=ppt/slides/slide3.xml><?xml version="1.0" encoding="utf-8"?>
+<file path=ppt/slides/slide2.xml><?xml version="1.0" encoding="utf-8"?>
 <p:sld xmlns:a="http://schemas.openxmlformats.org/drawingml/2006/main" xmlns:r="http://schemas.openxmlformats.org/officeDocument/2006/relationships" xmlns:p="http://schemas.openxmlformats.org/presentationml/2006/main">
   <p:cSld name="Slide 2">
     <p:bg>
@@ -7309,7 +7097,184 @@
 </p:sld>
 </file>
 
-<file path=ppt/slides/slide4.xml><?xml version="1.0" encoding="utf-8"?>
+<file path=ppt/slides/slide20.xml><?xml version="1.0" encoding="utf-8"?>
+<p:sld xmlns:a="http://schemas.openxmlformats.org/drawingml/2006/main" xmlns:r="http://schemas.openxmlformats.org/officeDocument/2006/relationships" xmlns:p="http://schemas.openxmlformats.org/presentationml/2006/main">
+  <p:cSld name="Slide 11">
+    <p:bg>
+      <p:bgPr>
+        <a:solidFill>
+          <a:srgbClr val="FFFFFF"/>
+        </a:solidFill>
+        <a:effectLst/>
+      </p:bgPr>
+    </p:bg>
+    <p:spTree>
+      <p:nvGrpSpPr>
+        <p:cNvPr id="1" name=""/>
+        <p:cNvGrpSpPr/>
+        <p:nvPr/>
+      </p:nvGrpSpPr>
+      <p:grpSpPr>
+        <a:xfrm>
+          <a:off x="0" y="0"/>
+          <a:ext cx="0" cy="0"/>
+          <a:chOff x="0" y="0"/>
+          <a:chExt cx="0" cy="0"/>
+        </a:xfrm>
+      </p:grpSpPr>
+      <p:sp>
+        <p:nvSpPr>
+          <p:cNvPr id="5" name="Text 3"/>
+          <p:cNvSpPr/>
+          <p:nvPr/>
+        </p:nvSpPr>
+        <p:spPr>
+          <a:xfrm>
+            <a:off x="914400" y="3017520"/>
+            <a:ext cx="7315200" cy="411480"/>
+          </a:xfrm>
+          <a:prstGeom prst="rect">
+            <a:avLst/>
+          </a:prstGeom>
+          <a:noFill/>
+          <a:ln/>
+        </p:spPr>
+        <p:txBody>
+          <a:bodyPr wrap="square" rtlCol="0" anchor="ctr"/>
+          <a:lstStyle/>
+          <a:p>
+            <a:pPr marL="0" indent="0" algn="ctr">
+              <a:buNone/>
+            </a:pPr>
+            <a:r>
+              <a:rPr lang="en-US" sz="1400" kern="0" spc="200" dirty="0">
+                <a:latin typeface="Lato" panose="020F0502020204030203" pitchFamily="34" charset="0"/>
+                <a:ea typeface="Calibri" pitchFamily="34" charset="-122"/>
+                <a:cs typeface="Arial" panose="020B0604020202020204" pitchFamily="34" charset="0"/>
+              </a:rPr>
+              <a:t>AICW Fellowship  |  Student Project Presentation 2026</a:t>
+            </a:r>
+            <a:endParaRPr lang="en-US" sz="1400" dirty="0">
+              <a:latin typeface="Lato" panose="020F0502020204030203" pitchFamily="34" charset="0"/>
+              <a:cs typeface="Arial" panose="020B0604020202020204" pitchFamily="34" charset="0"/>
+            </a:endParaRPr>
+          </a:p>
+        </p:txBody>
+      </p:sp>
+      <p:sp>
+        <p:nvSpPr>
+          <p:cNvPr id="6" name="Text 4"/>
+          <p:cNvSpPr/>
+          <p:nvPr/>
+        </p:nvSpPr>
+        <p:spPr>
+          <a:xfrm>
+            <a:off x="914400" y="3566160"/>
+            <a:ext cx="7315200" cy="320040"/>
+          </a:xfrm>
+          <a:prstGeom prst="rect">
+            <a:avLst/>
+          </a:prstGeom>
+          <a:noFill/>
+          <a:ln/>
+        </p:spPr>
+        <p:txBody>
+          <a:bodyPr wrap="square" lIns="91440" tIns="45720" rIns="91440" bIns="45720" rtlCol="0" anchor="ctr"/>
+          <a:lstStyle/>
+          <a:p>
+            <a:pPr marL="0" indent="0" algn="ctr">
+              <a:buNone/>
+            </a:pPr>
+            <a:r>
+              <a:rPr lang="en-US" sz="1100" dirty="0">
+                <a:latin typeface="Lato" panose="020F0502020204030203" pitchFamily="34" charset="0"/>
+                <a:ea typeface="Calibri"/>
+                <a:cs typeface="Arial" panose="020B0604020202020204" pitchFamily="34" charset="0"/>
+              </a:rPr>
+              <a:t>  LinkedIn  |   </a:t>
+            </a:r>
+            <a:r>
+              <a:rPr lang="en-US" sz="1100" dirty="0" err="1">
+                <a:latin typeface="Lato" panose="020F0502020204030203" pitchFamily="34" charset="0"/>
+                <a:ea typeface="Calibri"/>
+                <a:cs typeface="Arial" panose="020B0604020202020204" pitchFamily="34" charset="0"/>
+              </a:rPr>
+              <a:t>Edunet</a:t>
+            </a:r>
+            <a:r>
+              <a:rPr lang="en-US" sz="1100" dirty="0">
+                <a:latin typeface="Lato" panose="020F0502020204030203" pitchFamily="34" charset="0"/>
+                <a:ea typeface="Calibri"/>
+                <a:cs typeface="Arial" panose="020B0604020202020204" pitchFamily="34" charset="0"/>
+              </a:rPr>
+              <a:t> Foundation</a:t>
+            </a:r>
+            <a:endParaRPr lang="en-US" sz="1100" dirty="0">
+              <a:latin typeface="Lato" panose="020F0502020204030203" pitchFamily="34" charset="0"/>
+              <a:cs typeface="Arial" panose="020B0604020202020204" pitchFamily="34" charset="0"/>
+            </a:endParaRPr>
+          </a:p>
+        </p:txBody>
+      </p:sp>
+      <p:sp>
+        <p:nvSpPr>
+          <p:cNvPr id="9" name="TextBox 4">
+            <a:extLst>
+              <a:ext uri="{FF2B5EF4-FFF2-40B4-BE49-F238E27FC236}">
+                <a16:creationId xmlns:a16="http://schemas.microsoft.com/office/drawing/2014/main" id="{F7A740B1-0782-B37E-5F62-503024E32BC9}"/>
+              </a:ext>
+            </a:extLst>
+          </p:cNvPr>
+          <p:cNvSpPr txBox="1"/>
+          <p:nvPr/>
+        </p:nvSpPr>
+        <p:spPr>
+          <a:xfrm>
+            <a:off x="2632982" y="1705295"/>
+            <a:ext cx="3878036" cy="1175065"/>
+          </a:xfrm>
+          <a:prstGeom prst="rect">
+            <a:avLst/>
+          </a:prstGeom>
+        </p:spPr>
+        <p:txBody>
+          <a:bodyPr wrap="square" lIns="0" tIns="0" rIns="0" bIns="0" rtlCol="0" anchor="t">
+            <a:spAutoFit/>
+          </a:bodyPr>
+          <a:lstStyle/>
+          <a:p>
+            <a:pPr algn="ctr">
+              <a:lnSpc>
+                <a:spcPts val="10686"/>
+              </a:lnSpc>
+            </a:pPr>
+            <a:r>
+              <a:rPr lang="en-US" sz="5000" b="1" dirty="0">
+                <a:solidFill>
+                  <a:srgbClr val="0D358D"/>
+                </a:solidFill>
+                <a:latin typeface="Lato" panose="020F0502020204030203" pitchFamily="34" charset="0"/>
+                <a:ea typeface="Aileron Ultra-Bold"/>
+                <a:cs typeface="Arial" panose="020B0604020202020204" pitchFamily="34" charset="0"/>
+                <a:sym typeface="Aileron Ultra-Bold"/>
+              </a:rPr>
+              <a:t>Thank You</a:t>
+            </a:r>
+          </a:p>
+        </p:txBody>
+      </p:sp>
+    </p:spTree>
+    <p:custDataLst>
+      <p:tags r:id="rId1"/>
+    </p:custDataLst>
+  </p:cSld>
+  <p:clrMapOvr>
+    <a:masterClrMapping/>
+  </p:clrMapOvr>
+</p:sld>
+</file>
+
+<file path=ppt/slides/slide3.xml><?xml version="1.0" encoding="utf-8"?>
 <p:sld xmlns:a="http://schemas.openxmlformats.org/drawingml/2006/main" xmlns:r="http://schemas.openxmlformats.org/officeDocument/2006/relationships" xmlns:p="http://schemas.openxmlformats.org/presentationml/2006/main">
   <p:cSld name="Slide 3">
     <p:bg>
@@ -7628,7 +7593,7 @@
 </p:sld>
 </file>
 
-<file path=ppt/slides/slide5.xml><?xml version="1.0" encoding="utf-8"?>
+<file path=ppt/slides/slide4.xml><?xml version="1.0" encoding="utf-8"?>
 <p:sld xmlns:a="http://schemas.openxmlformats.org/drawingml/2006/main" xmlns:r="http://schemas.openxmlformats.org/officeDocument/2006/relationships" xmlns:p="http://schemas.openxmlformats.org/presentationml/2006/main">
   <p:cSld name="Slide 4">
     <p:bg>
@@ -8571,7 +8536,7 @@
 </p:sld>
 </file>
 
-<file path=ppt/slides/slide6.xml><?xml version="1.0" encoding="utf-8"?>
+<file path=ppt/slides/slide5.xml><?xml version="1.0" encoding="utf-8"?>
 <p:sld xmlns:a="http://schemas.openxmlformats.org/drawingml/2006/main" xmlns:r="http://schemas.openxmlformats.org/officeDocument/2006/relationships" xmlns:p="http://schemas.openxmlformats.org/presentationml/2006/main">
   <p:cSld name="Slide 5">
     <p:bg>
@@ -8994,7 +8959,7 @@
 </p:sld>
 </file>
 
-<file path=ppt/slides/slide7.xml><?xml version="1.0" encoding="utf-8"?>
+<file path=ppt/slides/slide6.xml><?xml version="1.0" encoding="utf-8"?>
 <p:sld xmlns:a="http://schemas.openxmlformats.org/drawingml/2006/main" xmlns:r="http://schemas.openxmlformats.org/officeDocument/2006/relationships" xmlns:p="http://schemas.openxmlformats.org/presentationml/2006/main">
   <p:cSld name="Slide 6">
     <p:bg>
@@ -9983,7 +9948,7 @@
 </p:sld>
 </file>
 
-<file path=ppt/slides/slide8.xml><?xml version="1.0" encoding="utf-8"?>
+<file path=ppt/slides/slide7.xml><?xml version="1.0" encoding="utf-8"?>
 <p:sld xmlns:a="http://schemas.openxmlformats.org/drawingml/2006/main" xmlns:r="http://schemas.openxmlformats.org/officeDocument/2006/relationships" xmlns:p="http://schemas.openxmlformats.org/presentationml/2006/main">
   <p:cSld>
     <p:spTree>
@@ -10061,7 +10026,7 @@
 </p:sld>
 </file>
 
-<file path=ppt/slides/slide9.xml><?xml version="1.0" encoding="utf-8"?>
+<file path=ppt/slides/slide8.xml><?xml version="1.0" encoding="utf-8"?>
 <p:sld xmlns:a="http://schemas.openxmlformats.org/drawingml/2006/main" xmlns:r="http://schemas.openxmlformats.org/officeDocument/2006/relationships" xmlns:p="http://schemas.openxmlformats.org/presentationml/2006/main">
   <p:cSld>
     <p:spTree>
@@ -10151,6 +10116,105 @@
     <p:extLst>
       <p:ext uri="{BB962C8B-B14F-4D97-AF65-F5344CB8AC3E}">
         <p14:creationId xmlns:p14="http://schemas.microsoft.com/office/powerpoint/2010/main" val="3129863567"/>
+      </p:ext>
+    </p:extLst>
+  </p:cSld>
+  <p:clrMapOvr>
+    <a:masterClrMapping/>
+  </p:clrMapOvr>
+</p:sld>
+</file>
+
+<file path=ppt/slides/slide9.xml><?xml version="1.0" encoding="utf-8"?>
+<p:sld xmlns:a="http://schemas.openxmlformats.org/drawingml/2006/main" xmlns:r="http://schemas.openxmlformats.org/officeDocument/2006/relationships" xmlns:p="http://schemas.openxmlformats.org/presentationml/2006/main">
+  <p:cSld>
+    <p:spTree>
+      <p:nvGrpSpPr>
+        <p:cNvPr id="1" name=""/>
+        <p:cNvGrpSpPr/>
+        <p:nvPr/>
+      </p:nvGrpSpPr>
+      <p:grpSpPr>
+        <a:xfrm>
+          <a:off x="0" y="0"/>
+          <a:ext cx="0" cy="0"/>
+          <a:chOff x="0" y="0"/>
+          <a:chExt cx="0" cy="0"/>
+        </a:xfrm>
+      </p:grpSpPr>
+      <p:pic>
+        <p:nvPicPr>
+          <p:cNvPr id="3" name="Picture 2">
+            <a:extLst>
+              <a:ext uri="{FF2B5EF4-FFF2-40B4-BE49-F238E27FC236}">
+                <a16:creationId xmlns:a16="http://schemas.microsoft.com/office/drawing/2014/main" id="{7ED0D84F-9D45-666D-1574-02750813FEFB}"/>
+              </a:ext>
+            </a:extLst>
+          </p:cNvPr>
+          <p:cNvPicPr>
+            <a:picLocks noChangeAspect="1"/>
+          </p:cNvPicPr>
+          <p:nvPr/>
+        </p:nvPicPr>
+        <p:blipFill>
+          <a:blip r:embed="rId2"/>
+          <a:stretch>
+            <a:fillRect/>
+          </a:stretch>
+        </p:blipFill>
+        <p:spPr>
+          <a:xfrm>
+            <a:off x="0" y="954484"/>
+            <a:ext cx="9144000" cy="4073779"/>
+          </a:xfrm>
+          <a:prstGeom prst="rect">
+            <a:avLst/>
+          </a:prstGeom>
+        </p:spPr>
+      </p:pic>
+      <p:sp>
+        <p:nvSpPr>
+          <p:cNvPr id="4" name="TextBox 3">
+            <a:extLst>
+              <a:ext uri="{FF2B5EF4-FFF2-40B4-BE49-F238E27FC236}">
+                <a16:creationId xmlns:a16="http://schemas.microsoft.com/office/drawing/2014/main" id="{893E54F0-7FB2-DED8-DE94-08428149F6FC}"/>
+              </a:ext>
+            </a:extLst>
+          </p:cNvPr>
+          <p:cNvSpPr txBox="1"/>
+          <p:nvPr/>
+        </p:nvSpPr>
+        <p:spPr>
+          <a:xfrm>
+            <a:off x="1013460" y="369709"/>
+            <a:ext cx="7254240" cy="523220"/>
+          </a:xfrm>
+          <a:prstGeom prst="rect">
+            <a:avLst/>
+          </a:prstGeom>
+          <a:noFill/>
+        </p:spPr>
+        <p:txBody>
+          <a:bodyPr wrap="square" rtlCol="0">
+            <a:spAutoFit/>
+          </a:bodyPr>
+          <a:lstStyle/>
+          <a:p>
+            <a:pPr algn="ctr"/>
+            <a:r>
+              <a:rPr lang="en-IN" sz="2800" b="1" dirty="0">
+                <a:latin typeface="Times New Roman" panose="02020603050405020304" pitchFamily="18" charset="0"/>
+                <a:cs typeface="Times New Roman" panose="02020603050405020304" pitchFamily="18" charset="0"/>
+              </a:rPr>
+              <a:t>Cleaned Data Set</a:t>
+            </a:r>
+          </a:p>
+        </p:txBody>
+      </p:sp>
+    </p:spTree>
+    <p:extLst>
+      <p:ext uri="{BB962C8B-B14F-4D97-AF65-F5344CB8AC3E}">
+        <p14:creationId xmlns:p14="http://schemas.microsoft.com/office/powerpoint/2010/main" val="1178234491"/>
       </p:ext>
     </p:extLst>
   </p:cSld>
